--- a/samples/2020-09-24-hazira-gas-release-fire/outputs/safety-alert.pptx
+++ b/samples/2020-09-24-hazira-gas-release-fire/outputs/safety-alert.pptx
@@ -2820,7 +2820,7 @@
                   <a:srgbClr val="1F2328"/>
                 </a:solidFill>
               </a:rPr>
-              <a:t>Generated with ProbeMatrix Learnings Coach v2.0.0a7 (open source, MIT) from a ProbeMatrix four-level human-factors investigation. ProbeMatrix by Eyekyam: ashley@eyekyam.com</a:t>
+              <a:t>Generated with ProbeMatrix Learnings Coach v2.0.0a8 (open source, MIT) from a ProbeMatrix four-level human-factors investigation. ProbeMatrix by Eyekyam: ashley@eyekyam.com</a:t>
             </a:r>
             <a:endParaRPr lang="en" sz="1200" dirty="0"/>
           </a:p>
@@ -3213,7 +3213,7 @@
                   <a:srgbClr val="57606A"/>
                 </a:solidFill>
               </a:rPr>
-              <a:t>Learning purposes: not a statutory document · Generated with ProbeMatrix Learnings Coach v2.0.0a7 (open source, MIT) from a ProbeMatrix four-level human-factors investigation. ProbeMatrix by Eyekyam: ashley@eyekyam.com</a:t>
+              <a:t>Learning purposes: not a statutory document · Generated with ProbeMatrix Learnings Coach v2.0.0a8 (open source, MIT) from a ProbeMatrix four-level human-factors investigation. ProbeMatrix by Eyekyam: ashley@eyekyam.com</a:t>
             </a:r>
             <a:endParaRPr lang="en" sz="900" dirty="0"/>
           </a:p>
@@ -3764,7 +3764,7 @@
                   <a:srgbClr val="57606A"/>
                 </a:solidFill>
               </a:rPr>
-              <a:t>Learning purposes: not a statutory document · Generated with ProbeMatrix Learnings Coach v2.0.0a7 (open source, MIT) from a ProbeMatrix four-level human-factors investigation. ProbeMatrix by Eyekyam: ashley@eyekyam.com</a:t>
+              <a:t>Learning purposes: not a statutory document · Generated with ProbeMatrix Learnings Coach v2.0.0a8 (open source, MIT) from a ProbeMatrix four-level human-factors investigation. ProbeMatrix by Eyekyam: ashley@eyekyam.com</a:t>
             </a:r>
             <a:endParaRPr lang="en" sz="900" dirty="0"/>
           </a:p>
@@ -3971,7 +3971,7 @@
                   <a:srgbClr val="57606A"/>
                 </a:solidFill>
               </a:rPr>
-              <a:t>Generated with ProbeMatrix Learnings Coach v2.0.0a7 (open source, MIT) from a ProbeMatrix four-level human-factors investigation. ProbeMatrix by Eyekyam: ashley@eyekyam.com</a:t>
+              <a:t>Generated with ProbeMatrix Learnings Coach v2.0.0a8 (open source, MIT) from a ProbeMatrix four-level human-factors investigation. ProbeMatrix by Eyekyam: ashley@eyekyam.com</a:t>
             </a:r>
             <a:endParaRPr lang="en" sz="1400" dirty="0"/>
           </a:p>
@@ -4014,7 +4014,7 @@
                   <a:srgbClr val="57606A"/>
                 </a:solidFill>
               </a:rPr>
-              <a:t>Learning purposes: not a statutory document · Generated with ProbeMatrix Learnings Coach v2.0.0a7 (open source, MIT) from a ProbeMatrix four-level human-factors investigation. ProbeMatrix by Eyekyam: ashley@eyekyam.com</a:t>
+              <a:t>Learning purposes: not a statutory document · Generated with ProbeMatrix Learnings Coach v2.0.0a8 (open source, MIT) from a ProbeMatrix four-level human-factors investigation. ProbeMatrix by Eyekyam: ashley@eyekyam.com</a:t>
             </a:r>
             <a:endParaRPr lang="en" sz="900" dirty="0"/>
           </a:p>
